--- a/Data/临时数据/Report_0929.pptx
+++ b/Data/临时数据/Report_0929.pptx
@@ -9,16 +9,17 @@
   </p:notesMasterIdLst>
   <p:sldIdLst>
     <p:sldId id="261" r:id="rId3"/>
-    <p:sldId id="267" r:id="rId5"/>
-    <p:sldId id="268" r:id="rId6"/>
-    <p:sldId id="266" r:id="rId7"/>
-    <p:sldId id="257" r:id="rId8"/>
+    <p:sldId id="269" r:id="rId5"/>
+    <p:sldId id="270" r:id="rId6"/>
+    <p:sldId id="257" r:id="rId7"/>
+    <p:sldId id="268" r:id="rId8"/>
     <p:sldId id="264" r:id="rId9"/>
-    <p:sldId id="263" r:id="rId10"/>
-    <p:sldId id="265" r:id="rId11"/>
-    <p:sldId id="258" r:id="rId12"/>
-    <p:sldId id="259" r:id="rId13"/>
-    <p:sldId id="260" r:id="rId14"/>
+    <p:sldId id="266" r:id="rId10"/>
+    <p:sldId id="263" r:id="rId11"/>
+    <p:sldId id="265" r:id="rId12"/>
+    <p:sldId id="258" r:id="rId13"/>
+    <p:sldId id="259" r:id="rId14"/>
+    <p:sldId id="260" r:id="rId15"/>
   </p:sldIdLst>
   <p:sldSz cx="9144000" cy="6858000"/>
   <p:notesSz cx="6858000" cy="9144000"/>
@@ -386,6 +387,70 @@
 </file>
 
 <file path=ppt/notesSlides/notesSlide11.xml><?xml version="1.0" encoding="utf-8"?>
+<p:notes xmlns:a="http://schemas.openxmlformats.org/drawingml/2006/main" xmlns:r="http://schemas.openxmlformats.org/officeDocument/2006/relationships" xmlns:p="http://schemas.openxmlformats.org/presentationml/2006/main">
+  <p:cSld>
+    <p:spTree>
+      <p:nvGrpSpPr>
+        <p:cNvPr id="1" name=""/>
+        <p:cNvGrpSpPr/>
+        <p:nvPr/>
+      </p:nvGrpSpPr>
+      <p:grpSpPr/>
+      <p:sp>
+        <p:nvSpPr>
+          <p:cNvPr id="2" name="Slide Image Placeholder 1"/>
+          <p:cNvSpPr>
+            <a:spLocks noGrp="1"/>
+          </p:cNvSpPr>
+          <p:nvPr>
+            <p:ph type="sldImg"/>
+          </p:nvPr>
+        </p:nvSpPr>
+        <p:spPr/>
+      </p:sp>
+      <p:sp>
+        <p:nvSpPr>
+          <p:cNvPr id="3" name="Notes Placeholder 2"/>
+          <p:cNvSpPr>
+            <a:spLocks noGrp="1"/>
+          </p:cNvSpPr>
+          <p:nvPr>
+            <p:ph type="body" idx="1"/>
+          </p:nvPr>
+        </p:nvSpPr>
+        <p:spPr/>
+        <p:txBody>
+          <a:bodyPr/>
+          <a:lstStyle/>
+          <a:p/>
+        </p:txBody>
+      </p:sp>
+      <p:sp>
+        <p:nvSpPr>
+          <p:cNvPr id="4" name="Slide Number Placeholder 3"/>
+          <p:cNvSpPr>
+            <a:spLocks noGrp="1"/>
+          </p:cNvSpPr>
+          <p:nvPr>
+            <p:ph type="sldNum" idx="5"/>
+          </p:nvPr>
+        </p:nvSpPr>
+        <p:spPr/>
+        <p:txBody>
+          <a:bodyPr/>
+          <a:lstStyle/>
+          <a:p/>
+        </p:txBody>
+      </p:sp>
+    </p:spTree>
+  </p:cSld>
+  <p:clrMapOvr>
+    <a:masterClrMapping/>
+  </p:clrMapOvr>
+</p:notes>
+</file>
+
+<file path=ppt/notesSlides/notesSlide12.xml><?xml version="1.0" encoding="utf-8"?>
 <p:notes xmlns:a="http://schemas.openxmlformats.org/drawingml/2006/main" xmlns:r="http://schemas.openxmlformats.org/officeDocument/2006/relationships" xmlns:p="http://schemas.openxmlformats.org/presentationml/2006/main">
   <p:cSld>
     <p:spTree>
@@ -3891,7 +3956,7 @@
                 <a:ea typeface="Times New Roman" panose="02020603050405020304"/>
                 <a:cs typeface="Times New Roman" panose="02020603050405020304"/>
               </a:rPr>
-              <a:t>Main Issue</a:t>
+              <a:t>Model and Test Results</a:t>
             </a:r>
             <a:endParaRPr sz="3200" b="1">
               <a:latin typeface="Times New Roman" panose="02020603050405020304"/>
@@ -3901,54 +3966,12 @@
           </a:p>
         </p:txBody>
       </p:sp>
-      <p:sp>
-        <p:nvSpPr>
-          <p:cNvPr id="8" name="文本框 7"/>
-          <p:cNvSpPr>
-            <a:spLocks noGrp="1"/>
-          </p:cNvSpPr>
-          <p:nvPr/>
-        </p:nvSpPr>
-        <p:spPr>
-          <a:xfrm>
-            <a:off x="275590" y="810260"/>
-            <a:ext cx="8295640" cy="584200"/>
-          </a:xfrm>
-          <a:prstGeom prst="rect">
-            <a:avLst/>
-          </a:prstGeom>
-          <a:noFill/>
-        </p:spPr>
-        <p:txBody>
-          <a:bodyPr wrap="square">
-            <a:noAutofit/>
-          </a:bodyPr>
-          <a:lstStyle/>
-          <a:p>
-            <a:r>
-              <a:t>The remaining issue</a:t>
-            </a:r>
-            <a:r>
-              <a:rPr lang="en-US"/>
-              <a:t> still</a:t>
-            </a:r>
-            <a:r>
-              <a:t> is the real-time integrated velocity from the IMU. I tried several program adjustments, but </a:t>
-            </a:r>
-            <a:r>
-              <a:rPr lang="en-US"/>
-              <a:t>that still have some problem</a:t>
-            </a:r>
-            <a:r>
-              <a:t>.</a:t>
-            </a:r>
-          </a:p>
-        </p:txBody>
-      </p:sp>
       <p:pic>
         <p:nvPicPr>
-          <p:cNvPr id="3" name="图片 2"/>
-          <p:cNvPicPr/>
+          <p:cNvPr id="19" name="图片 6"/>
+          <p:cNvPicPr>
+            <a:picLocks noChangeAspect="1"/>
+          </p:cNvPicPr>
           <p:nvPr/>
         </p:nvPicPr>
         <p:blipFill>
@@ -3959,14 +3982,326 @@
         </p:blipFill>
         <p:spPr>
           <a:xfrm>
-            <a:off x="275590" y="1752600"/>
-            <a:ext cx="8523605" cy="4724400"/>
+            <a:off x="4706620" y="0"/>
+            <a:ext cx="4437380" cy="2218690"/>
           </a:xfrm>
           <a:prstGeom prst="rect">
             <a:avLst/>
           </a:prstGeom>
         </p:spPr>
       </p:pic>
+      <p:sp>
+        <p:nvSpPr>
+          <p:cNvPr id="8" name="文本框 7"/>
+          <p:cNvSpPr>
+            <a:spLocks noGrp="1"/>
+          </p:cNvSpPr>
+          <p:nvPr/>
+        </p:nvSpPr>
+        <p:spPr>
+          <a:xfrm>
+            <a:off x="275590" y="810260"/>
+            <a:ext cx="5143500" cy="398780"/>
+          </a:xfrm>
+          <a:prstGeom prst="rect">
+            <a:avLst/>
+          </a:prstGeom>
+          <a:noFill/>
+        </p:spPr>
+        <p:txBody>
+          <a:bodyPr wrap="square" anchor="t">
+            <a:spAutoFit/>
+          </a:bodyPr>
+          <a:lstStyle/>
+          <a:p>
+            <a:r>
+              <a:rPr lang="en-US" sz="2000"/>
+              <a:t>Model: </a:t>
+            </a:r>
+            <a:r>
+              <a:rPr sz="2000"/>
+              <a:t>15-Frame Time-Window MLP</a:t>
+            </a:r>
+            <a:endParaRPr sz="2000"/>
+          </a:p>
+        </p:txBody>
+      </p:sp>
+      <p:pic>
+        <p:nvPicPr>
+          <p:cNvPr id="21" name="图片 8"/>
+          <p:cNvPicPr>
+            <a:picLocks noChangeAspect="1"/>
+          </p:cNvPicPr>
+          <p:nvPr/>
+        </p:nvPicPr>
+        <p:blipFill>
+          <a:blip r:embed="rId2"/>
+          <a:stretch>
+            <a:fillRect/>
+          </a:stretch>
+        </p:blipFill>
+        <p:spPr>
+          <a:xfrm>
+            <a:off x="4706620" y="4438015"/>
+            <a:ext cx="4436110" cy="2218690"/>
+          </a:xfrm>
+          <a:prstGeom prst="rect">
+            <a:avLst/>
+          </a:prstGeom>
+        </p:spPr>
+      </p:pic>
+      <p:pic>
+        <p:nvPicPr>
+          <p:cNvPr id="22" name="图片 10"/>
+          <p:cNvPicPr>
+            <a:picLocks noChangeAspect="1"/>
+          </p:cNvPicPr>
+          <p:nvPr/>
+        </p:nvPicPr>
+        <p:blipFill>
+          <a:blip r:embed="rId3"/>
+          <a:stretch>
+            <a:fillRect/>
+          </a:stretch>
+        </p:blipFill>
+        <p:spPr>
+          <a:xfrm>
+            <a:off x="4706620" y="2218690"/>
+            <a:ext cx="4437380" cy="2219325"/>
+          </a:xfrm>
+          <a:prstGeom prst="rect">
+            <a:avLst/>
+          </a:prstGeom>
+        </p:spPr>
+      </p:pic>
+      <p:pic>
+        <p:nvPicPr>
+          <p:cNvPr id="23" name="图片 11"/>
+          <p:cNvPicPr>
+            <a:picLocks noChangeAspect="1"/>
+          </p:cNvPicPr>
+          <p:nvPr/>
+        </p:nvPicPr>
+        <p:blipFill>
+          <a:blip r:embed="rId4"/>
+          <a:stretch>
+            <a:fillRect/>
+          </a:stretch>
+        </p:blipFill>
+        <p:spPr>
+          <a:xfrm>
+            <a:off x="0" y="3882390"/>
+            <a:ext cx="4624070" cy="2774315"/>
+          </a:xfrm>
+          <a:prstGeom prst="rect">
+            <a:avLst/>
+          </a:prstGeom>
+        </p:spPr>
+      </p:pic>
+      <p:sp>
+        <p:nvSpPr>
+          <p:cNvPr id="13" name="文本框 12"/>
+          <p:cNvSpPr>
+            <a:spLocks noGrp="1"/>
+          </p:cNvSpPr>
+          <p:nvPr/>
+        </p:nvSpPr>
+        <p:spPr>
+          <a:xfrm>
+            <a:off x="186690" y="3502025"/>
+            <a:ext cx="4437380" cy="368300"/>
+          </a:xfrm>
+          <a:prstGeom prst="rect">
+            <a:avLst/>
+          </a:prstGeom>
+          <a:noFill/>
+        </p:spPr>
+        <p:txBody>
+          <a:bodyPr wrap="square">
+            <a:spAutoFit/>
+          </a:bodyPr>
+          <a:lstStyle/>
+          <a:p>
+            <a:r>
+              <a:t>Test </a:t>
+            </a:r>
+            <a:r>
+              <a:rPr>
+                <a:sym typeface="+mn-ea"/>
+              </a:rPr>
+              <a:t>dataset</a:t>
+            </a:r>
+            <a:r>
+              <a:t>: 3 Object Sizes, 3 </a:t>
+            </a:r>
+            <a:r>
+              <a:rPr lang="en-US"/>
+              <a:t>t</a:t>
+            </a:r>
+            <a:r>
+              <a:t>rials </a:t>
+            </a:r>
+            <a:r>
+              <a:rPr lang="en-US"/>
+              <a:t>e</a:t>
+            </a:r>
+            <a:r>
+              <a:t>ach</a:t>
+            </a:r>
+          </a:p>
+        </p:txBody>
+      </p:sp>
+      <p:sp>
+        <p:nvSpPr>
+          <p:cNvPr id="5" name="文本框 4"/>
+          <p:cNvSpPr txBox="1"/>
+          <p:nvPr/>
+        </p:nvSpPr>
+        <p:spPr>
+          <a:xfrm>
+            <a:off x="186690" y="3068955"/>
+            <a:ext cx="4437380" cy="433705"/>
+          </a:xfrm>
+          <a:prstGeom prst="rect">
+            <a:avLst/>
+          </a:prstGeom>
+          <a:noFill/>
+        </p:spPr>
+        <p:txBody>
+          <a:bodyPr wrap="square" rtlCol="0">
+            <a:noAutofit/>
+          </a:bodyPr>
+          <a:p>
+            <a:r>
+              <a:rPr>
+                <a:sym typeface="+mn-ea"/>
+              </a:rPr>
+              <a:t>Training dataset: </a:t>
+            </a:r>
+            <a:r>
+              <a:rPr>
+                <a:sym typeface="+mn-ea"/>
+              </a:rPr>
+              <a:t>3 Object Sizes,</a:t>
+            </a:r>
+            <a:r>
+              <a:rPr lang="en-US">
+                <a:sym typeface="+mn-ea"/>
+              </a:rPr>
+              <a:t> </a:t>
+            </a:r>
+            <a:r>
+              <a:rPr>
+                <a:sym typeface="+mn-ea"/>
+              </a:rPr>
+              <a:t>10 trials </a:t>
+            </a:r>
+            <a:r>
+              <a:rPr lang="en-US">
+                <a:sym typeface="+mn-ea"/>
+              </a:rPr>
+              <a:t>e</a:t>
+            </a:r>
+            <a:r>
+              <a:rPr>
+                <a:sym typeface="+mn-ea"/>
+              </a:rPr>
+              <a:t>ach</a:t>
+            </a:r>
+            <a:endParaRPr>
+              <a:sym typeface="+mn-ea"/>
+            </a:endParaRPr>
+          </a:p>
+          <a:p>
+            <a:endParaRPr lang="zh-CN" altLang="en-US"/>
+          </a:p>
+        </p:txBody>
+      </p:sp>
+      <p:sp>
+        <p:nvSpPr>
+          <p:cNvPr id="2" name="文本框 1"/>
+          <p:cNvSpPr txBox="1"/>
+          <p:nvPr/>
+        </p:nvSpPr>
+        <p:spPr>
+          <a:xfrm>
+            <a:off x="275590" y="1144270"/>
+            <a:ext cx="3048000" cy="368300"/>
+          </a:xfrm>
+          <a:prstGeom prst="rect">
+            <a:avLst/>
+          </a:prstGeom>
+          <a:noFill/>
+        </p:spPr>
+        <p:txBody>
+          <a:bodyPr wrap="square" rtlCol="0">
+            <a:spAutoFit/>
+          </a:bodyPr>
+          <a:p>
+            <a:r>
+              <a:rPr lang="en-US" altLang="zh-CN"/>
+              <a:t>Three Input Modes:</a:t>
+            </a:r>
+            <a:endParaRPr lang="zh-CN" altLang="en-US">
+              <a:ea typeface="宋体" panose="02010600030101010101" pitchFamily="2" charset="-122"/>
+            </a:endParaRPr>
+          </a:p>
+        </p:txBody>
+      </p:sp>
+      <p:sp>
+        <p:nvSpPr>
+          <p:cNvPr id="3" name="文本框 2"/>
+          <p:cNvSpPr txBox="1"/>
+          <p:nvPr/>
+        </p:nvSpPr>
+        <p:spPr>
+          <a:xfrm>
+            <a:off x="1382395" y="1449070"/>
+            <a:ext cx="3242310" cy="922020"/>
+          </a:xfrm>
+          <a:prstGeom prst="rect">
+            <a:avLst/>
+          </a:prstGeom>
+        </p:spPr>
+        <p:txBody>
+          <a:bodyPr wrap="square">
+            <a:spAutoFit/>
+          </a:bodyPr>
+          <a:p>
+            <a:pPr marL="285750" indent="-285750">
+              <a:buFont typeface="Arial" panose="020B0604020202020204" pitchFamily="34" charset="0"/>
+              <a:buChar char="•"/>
+            </a:pPr>
+            <a:r>
+              <a:rPr lang="en-US" altLang="zh-CN"/>
+              <a:t>Object Area</a:t>
+            </a:r>
+            <a:endParaRPr lang="en-US" altLang="zh-CN"/>
+          </a:p>
+          <a:p>
+            <a:pPr marL="285750" indent="-285750">
+              <a:buFont typeface="Arial" panose="020B0604020202020204" pitchFamily="34" charset="0"/>
+              <a:buChar char="•"/>
+            </a:pPr>
+            <a:r>
+              <a:rPr lang="en-US" altLang="zh-CN"/>
+              <a:t>Object Area + Velocity</a:t>
+            </a:r>
+            <a:endParaRPr lang="en-US" altLang="zh-CN"/>
+          </a:p>
+          <a:p>
+            <a:pPr marL="285750" indent="-285750">
+              <a:buFont typeface="Arial" panose="020B0604020202020204" pitchFamily="34" charset="0"/>
+              <a:buChar char="•"/>
+            </a:pPr>
+            <a:r>
+              <a:rPr lang="en-US" altLang="zh-CN"/>
+              <a:t>Object Area + Acceleration</a:t>
+            </a:r>
+            <a:endParaRPr lang="en-US" altLang="zh-CN"/>
+          </a:p>
+        </p:txBody>
+      </p:sp>
     </p:spTree>
   </p:cSld>
   <p:clrMapOvr>
@@ -4010,6 +4345,130 @@
           <a:lstStyle/>
           <a:p>
             <a:r>
+              <a:rPr sz="3200" b="1">
+                <a:latin typeface="Times New Roman" panose="02020603050405020304"/>
+                <a:ea typeface="Times New Roman" panose="02020603050405020304"/>
+                <a:cs typeface="Times New Roman" panose="02020603050405020304"/>
+              </a:rPr>
+              <a:t>Main Issue</a:t>
+            </a:r>
+            <a:endParaRPr sz="3200" b="1">
+              <a:latin typeface="Times New Roman" panose="02020603050405020304"/>
+              <a:ea typeface="Times New Roman" panose="02020603050405020304"/>
+              <a:cs typeface="Times New Roman" panose="02020603050405020304"/>
+            </a:endParaRPr>
+          </a:p>
+        </p:txBody>
+      </p:sp>
+      <p:sp>
+        <p:nvSpPr>
+          <p:cNvPr id="8" name="文本框 7"/>
+          <p:cNvSpPr>
+            <a:spLocks noGrp="1"/>
+          </p:cNvSpPr>
+          <p:nvPr/>
+        </p:nvSpPr>
+        <p:spPr>
+          <a:xfrm>
+            <a:off x="275590" y="810260"/>
+            <a:ext cx="8295640" cy="584200"/>
+          </a:xfrm>
+          <a:prstGeom prst="rect">
+            <a:avLst/>
+          </a:prstGeom>
+          <a:noFill/>
+        </p:spPr>
+        <p:txBody>
+          <a:bodyPr wrap="square">
+            <a:noAutofit/>
+          </a:bodyPr>
+          <a:lstStyle/>
+          <a:p>
+            <a:r>
+              <a:t>The remaining issue</a:t>
+            </a:r>
+            <a:r>
+              <a:rPr lang="en-US"/>
+              <a:t> still</a:t>
+            </a:r>
+            <a:r>
+              <a:t> is the real-time integrated velocity from the IMU. I tried several program adjustments, but </a:t>
+            </a:r>
+            <a:r>
+              <a:rPr lang="en-US"/>
+              <a:t>that still have some problem</a:t>
+            </a:r>
+            <a:r>
+              <a:t>.</a:t>
+            </a:r>
+          </a:p>
+        </p:txBody>
+      </p:sp>
+      <p:pic>
+        <p:nvPicPr>
+          <p:cNvPr id="3" name="图片 2"/>
+          <p:cNvPicPr/>
+          <p:nvPr/>
+        </p:nvPicPr>
+        <p:blipFill>
+          <a:blip r:embed="rId1"/>
+          <a:stretch>
+            <a:fillRect/>
+          </a:stretch>
+        </p:blipFill>
+        <p:spPr>
+          <a:xfrm>
+            <a:off x="275590" y="1752600"/>
+            <a:ext cx="8523605" cy="4724400"/>
+          </a:xfrm>
+          <a:prstGeom prst="rect">
+            <a:avLst/>
+          </a:prstGeom>
+        </p:spPr>
+      </p:pic>
+    </p:spTree>
+  </p:cSld>
+  <p:clrMapOvr>
+    <a:masterClrMapping/>
+  </p:clrMapOvr>
+</p:sld>
+</file>
+
+<file path=ppt/slides/slide12.xml><?xml version="1.0" encoding="utf-8"?>
+<p:sld xmlns:a="http://schemas.openxmlformats.org/drawingml/2006/main" xmlns:r="http://schemas.openxmlformats.org/officeDocument/2006/relationships" xmlns:p="http://schemas.openxmlformats.org/presentationml/2006/main">
+  <p:cSld>
+    <p:spTree>
+      <p:nvGrpSpPr>
+        <p:cNvPr id="1" name=""/>
+        <p:cNvGrpSpPr/>
+        <p:nvPr/>
+      </p:nvGrpSpPr>
+      <p:grpSpPr/>
+      <p:sp>
+        <p:nvSpPr>
+          <p:cNvPr id="6" name="文本框 5"/>
+          <p:cNvSpPr>
+            <a:spLocks noGrp="1"/>
+          </p:cNvSpPr>
+          <p:nvPr/>
+        </p:nvSpPr>
+        <p:spPr>
+          <a:xfrm>
+            <a:off x="275590" y="226695"/>
+            <a:ext cx="8522970" cy="583565"/>
+          </a:xfrm>
+          <a:prstGeom prst="rect">
+            <a:avLst/>
+          </a:prstGeom>
+          <a:noFill/>
+        </p:spPr>
+        <p:txBody>
+          <a:bodyPr wrap="square">
+            <a:spAutoFit/>
+          </a:bodyPr>
+          <a:lstStyle/>
+          <a:p>
+            <a:r>
               <a:rPr lang="en-US" altLang="zh-CN" sz="3200" b="1">
                 <a:latin typeface="Times New Roman" panose="02020603050405020304"/>
                 <a:ea typeface="Times New Roman" panose="02020603050405020304"/>
@@ -4120,9 +4579,49 @@
         <p:nvPr/>
       </p:nvGrpSpPr>
       <p:grpSpPr/>
+      <p:sp>
+        <p:nvSpPr>
+          <p:cNvPr id="6" name="文本框 5"/>
+          <p:cNvSpPr>
+            <a:spLocks noGrp="1"/>
+          </p:cNvSpPr>
+          <p:nvPr/>
+        </p:nvSpPr>
+        <p:spPr>
+          <a:xfrm>
+            <a:off x="275590" y="226695"/>
+            <a:ext cx="8522970" cy="583565"/>
+          </a:xfrm>
+          <a:prstGeom prst="rect">
+            <a:avLst/>
+          </a:prstGeom>
+          <a:noFill/>
+        </p:spPr>
+        <p:txBody>
+          <a:bodyPr wrap="square">
+            <a:spAutoFit/>
+          </a:bodyPr>
+          <a:lstStyle/>
+          <a:p>
+            <a:r>
+              <a:rPr lang="zh-CN" sz="3200" b="1">
+                <a:latin typeface="Times New Roman" panose="02020603050405020304"/>
+                <a:ea typeface="宋体" panose="02010600030101010101" pitchFamily="2" charset="-122"/>
+                <a:cs typeface="Times New Roman" panose="02020603050405020304"/>
+              </a:rPr>
+              <a:t>大致流程</a:t>
+            </a:r>
+            <a:endParaRPr lang="zh-CN" sz="3200" b="1">
+              <a:latin typeface="Times New Roman" panose="02020603050405020304"/>
+              <a:ea typeface="宋体" panose="02010600030101010101" pitchFamily="2" charset="-122"/>
+              <a:cs typeface="Times New Roman" panose="02020603050405020304"/>
+            </a:endParaRPr>
+          </a:p>
+        </p:txBody>
+      </p:sp>
       <p:pic>
         <p:nvPicPr>
-          <p:cNvPr id="2" name="图片 1" descr="QQ20261005-232928"/>
+          <p:cNvPr id="5" name="图片 4" descr="QQ20261005-232928"/>
           <p:cNvPicPr>
             <a:picLocks noChangeAspect="1"/>
           </p:cNvPicPr>
@@ -4136,7 +4635,7 @@
         </p:blipFill>
         <p:spPr>
           <a:xfrm>
-            <a:off x="90805" y="389255"/>
+            <a:off x="513715" y="1016000"/>
             <a:ext cx="7606665" cy="5330190"/>
           </a:xfrm>
           <a:prstGeom prst="rect">
@@ -4162,9 +4661,47 @@
         <p:nvPr/>
       </p:nvGrpSpPr>
       <p:grpSpPr/>
+      <p:sp>
+        <p:nvSpPr>
+          <p:cNvPr id="6" name="文本框 5"/>
+          <p:cNvSpPr>
+            <a:spLocks noGrp="1"/>
+          </p:cNvSpPr>
+          <p:nvPr/>
+        </p:nvSpPr>
+        <p:spPr>
+          <a:xfrm>
+            <a:off x="275590" y="226695"/>
+            <a:ext cx="8522970" cy="583565"/>
+          </a:xfrm>
+          <a:prstGeom prst="rect">
+            <a:avLst/>
+          </a:prstGeom>
+          <a:noFill/>
+        </p:spPr>
+        <p:txBody>
+          <a:bodyPr wrap="square">
+            <a:spAutoFit/>
+          </a:bodyPr>
+          <a:lstStyle/>
+          <a:p>
+            <a:r>
+              <a:rPr lang="zh-CN" altLang="en-US" sz="3200">
+                <a:sym typeface="+mn-ea"/>
+              </a:rPr>
+              <a:t>运动信息的作用</a:t>
+            </a:r>
+            <a:endParaRPr lang="zh-CN" sz="3200" b="1">
+              <a:latin typeface="Times New Roman" panose="02020603050405020304"/>
+              <a:ea typeface="宋体" panose="02010600030101010101" pitchFamily="2" charset="-122"/>
+              <a:cs typeface="Times New Roman" panose="02020603050405020304"/>
+            </a:endParaRPr>
+          </a:p>
+        </p:txBody>
+      </p:sp>
       <p:pic>
         <p:nvPicPr>
-          <p:cNvPr id="3" name="图片 2"/>
+          <p:cNvPr id="3" name="图片 2" descr="捕获"/>
           <p:cNvPicPr>
             <a:picLocks noChangeAspect="1"/>
           </p:cNvPicPr>
@@ -4178,8 +4715,8 @@
         </p:blipFill>
         <p:spPr>
           <a:xfrm>
-            <a:off x="138430" y="289560"/>
-            <a:ext cx="8686800" cy="3619500"/>
+            <a:off x="275590" y="1047750"/>
+            <a:ext cx="7534275" cy="5372100"/>
           </a:xfrm>
           <a:prstGeom prst="rect">
             <a:avLst/>
@@ -4195,233 +4732,6 @@
 </file>
 
 <file path=ppt/slides/slide4.xml><?xml version="1.0" encoding="utf-8"?>
-<p:sld xmlns:a="http://schemas.openxmlformats.org/drawingml/2006/main" xmlns:r="http://schemas.openxmlformats.org/officeDocument/2006/relationships" xmlns:p="http://schemas.openxmlformats.org/presentationml/2006/main">
-  <p:cSld>
-    <p:spTree>
-      <p:nvGrpSpPr>
-        <p:cNvPr id="1" name=""/>
-        <p:cNvGrpSpPr/>
-        <p:nvPr/>
-      </p:nvGrpSpPr>
-      <p:grpSpPr/>
-      <p:pic>
-        <p:nvPicPr>
-          <p:cNvPr id="13" name="图片 6"/>
-          <p:cNvPicPr>
-            <a:picLocks noChangeAspect="1"/>
-          </p:cNvPicPr>
-          <p:nvPr/>
-        </p:nvPicPr>
-        <p:blipFill>
-          <a:blip r:embed="rId1"/>
-          <a:stretch>
-            <a:fillRect/>
-          </a:stretch>
-        </p:blipFill>
-        <p:spPr>
-          <a:xfrm>
-            <a:off x="0" y="885825"/>
-            <a:ext cx="5246370" cy="5321935"/>
-          </a:xfrm>
-          <a:prstGeom prst="rect">
-            <a:avLst/>
-          </a:prstGeom>
-        </p:spPr>
-      </p:pic>
-      <p:sp>
-        <p:nvSpPr>
-          <p:cNvPr id="6" name="文本框 5"/>
-          <p:cNvSpPr>
-            <a:spLocks noGrp="1"/>
-          </p:cNvSpPr>
-          <p:nvPr/>
-        </p:nvSpPr>
-        <p:spPr>
-          <a:xfrm>
-            <a:off x="275590" y="226695"/>
-            <a:ext cx="8522970" cy="583565"/>
-          </a:xfrm>
-          <a:prstGeom prst="rect">
-            <a:avLst/>
-          </a:prstGeom>
-          <a:noFill/>
-        </p:spPr>
-        <p:txBody>
-          <a:bodyPr wrap="square">
-            <a:spAutoFit/>
-          </a:bodyPr>
-          <a:lstStyle/>
-          <a:p>
-            <a:r>
-              <a:rPr sz="3200" b="1">
-                <a:latin typeface="Times New Roman" panose="02020603050405020304"/>
-                <a:ea typeface="Times New Roman" panose="02020603050405020304"/>
-                <a:cs typeface="Times New Roman" panose="02020603050405020304"/>
-              </a:rPr>
-              <a:t>Data Collection</a:t>
-            </a:r>
-            <a:endParaRPr sz="3200" b="1">
-              <a:latin typeface="Times New Roman" panose="02020603050405020304"/>
-              <a:ea typeface="Times New Roman" panose="02020603050405020304"/>
-              <a:cs typeface="Times New Roman" panose="02020603050405020304"/>
-            </a:endParaRPr>
-          </a:p>
-        </p:txBody>
-      </p:sp>
-      <p:sp>
-        <p:nvSpPr>
-          <p:cNvPr id="3" name="文本框 2"/>
-          <p:cNvSpPr>
-            <a:spLocks noGrp="1"/>
-          </p:cNvSpPr>
-          <p:nvPr/>
-        </p:nvSpPr>
-        <p:spPr>
-          <a:xfrm>
-            <a:off x="4658360" y="635000"/>
-            <a:ext cx="4303395" cy="579755"/>
-          </a:xfrm>
-          <a:prstGeom prst="rect">
-            <a:avLst/>
-          </a:prstGeom>
-          <a:noFill/>
-        </p:spPr>
-        <p:txBody>
-          <a:bodyPr wrap="square" anchor="t">
-            <a:noAutofit/>
-          </a:bodyPr>
-          <a:lstStyle/>
-          <a:p>
-            <a:r>
-              <a:rPr sz="2000"/>
-              <a:t>I Optimized the Experimental Workflow</a:t>
-            </a:r>
-            <a:endParaRPr sz="2000"/>
-          </a:p>
-        </p:txBody>
-      </p:sp>
-      <p:sp>
-        <p:nvSpPr>
-          <p:cNvPr id="4" name="文本框 3"/>
-          <p:cNvSpPr>
-            <a:spLocks noGrp="1"/>
-          </p:cNvSpPr>
-          <p:nvPr/>
-        </p:nvSpPr>
-        <p:spPr>
-          <a:xfrm>
-            <a:off x="5337810" y="1085215"/>
-            <a:ext cx="3806190" cy="992505"/>
-          </a:xfrm>
-          <a:prstGeom prst="rect">
-            <a:avLst/>
-          </a:prstGeom>
-          <a:noFill/>
-        </p:spPr>
-        <p:txBody>
-          <a:bodyPr wrap="square">
-            <a:noAutofit/>
-          </a:bodyPr>
-          <a:lstStyle/>
-          <a:p>
-            <a:pPr marL="285750" indent="-285750">
-              <a:buFont typeface="Arial" panose="020B0604020202020204" pitchFamily="34" charset="0"/>
-              <a:buChar char="•"/>
-            </a:pPr>
-            <a:r>
-              <a:t>Controlled grasping time, </a:t>
-            </a:r>
-          </a:p>
-          <a:p>
-            <a:pPr marL="285750" indent="-285750">
-              <a:buFont typeface="Arial" panose="020B0604020202020204" pitchFamily="34" charset="0"/>
-              <a:buChar char="•"/>
-            </a:pPr>
-            <a:r>
-              <a:t>grasping behavior, </a:t>
-            </a:r>
-          </a:p>
-          <a:p>
-            <a:pPr marL="285750" indent="-285750">
-              <a:buFont typeface="Arial" panose="020B0604020202020204" pitchFamily="34" charset="0"/>
-              <a:buChar char="•"/>
-            </a:pPr>
-            <a:r>
-              <a:t>the timing of opening and closing.</a:t>
-            </a:r>
-          </a:p>
-        </p:txBody>
-      </p:sp>
-      <p:pic>
-        <p:nvPicPr>
-          <p:cNvPr id="12" name="图片 4"/>
-          <p:cNvPicPr>
-            <a:picLocks noChangeAspect="1"/>
-          </p:cNvPicPr>
-          <p:nvPr/>
-        </p:nvPicPr>
-        <p:blipFill>
-          <a:blip r:embed="rId2"/>
-          <a:stretch>
-            <a:fillRect/>
-          </a:stretch>
-        </p:blipFill>
-        <p:spPr>
-          <a:xfrm>
-            <a:off x="4571365" y="4194810"/>
-            <a:ext cx="4303395" cy="2421255"/>
-          </a:xfrm>
-          <a:prstGeom prst="rect">
-            <a:avLst/>
-          </a:prstGeom>
-        </p:spPr>
-      </p:pic>
-      <p:sp>
-        <p:nvSpPr>
-          <p:cNvPr id="2" name="文本框 1"/>
-          <p:cNvSpPr txBox="1"/>
-          <p:nvPr/>
-        </p:nvSpPr>
-        <p:spPr>
-          <a:xfrm>
-            <a:off x="5338445" y="2522220"/>
-            <a:ext cx="3701415" cy="1095375"/>
-          </a:xfrm>
-          <a:prstGeom prst="rect">
-            <a:avLst/>
-          </a:prstGeom>
-          <a:noFill/>
-        </p:spPr>
-        <p:txBody>
-          <a:bodyPr wrap="square" rtlCol="0">
-            <a:noAutofit/>
-          </a:bodyPr>
-          <a:p>
-            <a:r>
-              <a:rPr lang="en-US">
-                <a:sym typeface="+mn-ea"/>
-              </a:rPr>
-              <a:t>#.But t</a:t>
-            </a:r>
-            <a:r>
-              <a:rPr>
-                <a:sym typeface="+mn-ea"/>
-              </a:rPr>
-              <a:t>he recognition algorithm causes fluctuations in the calculated object area and finger width.</a:t>
-            </a:r>
-            <a:endParaRPr lang="zh-CN" altLang="en-US"/>
-          </a:p>
-        </p:txBody>
-      </p:sp>
-    </p:spTree>
-  </p:cSld>
-  <p:clrMapOvr>
-    <a:masterClrMapping/>
-  </p:clrMapOvr>
-</p:sld>
-</file>
-
-<file path=ppt/slides/slide5.xml><?xml version="1.0" encoding="utf-8"?>
 <p:sld xmlns:a="http://schemas.openxmlformats.org/drawingml/2006/main" xmlns:r="http://schemas.openxmlformats.org/officeDocument/2006/relationships" xmlns:p="http://schemas.openxmlformats.org/presentationml/2006/main">
   <p:cSld>
     <p:spTree>
@@ -4828,6 +5138,48 @@
 </p:sld>
 </file>
 
+<file path=ppt/slides/slide5.xml><?xml version="1.0" encoding="utf-8"?>
+<p:sld xmlns:a="http://schemas.openxmlformats.org/drawingml/2006/main" xmlns:r="http://schemas.openxmlformats.org/officeDocument/2006/relationships" xmlns:p="http://schemas.openxmlformats.org/presentationml/2006/main">
+  <p:cSld>
+    <p:spTree>
+      <p:nvGrpSpPr>
+        <p:cNvPr id="1" name=""/>
+        <p:cNvGrpSpPr/>
+        <p:nvPr/>
+      </p:nvGrpSpPr>
+      <p:grpSpPr/>
+      <p:pic>
+        <p:nvPicPr>
+          <p:cNvPr id="3" name="图片 2"/>
+          <p:cNvPicPr>
+            <a:picLocks noChangeAspect="1"/>
+          </p:cNvPicPr>
+          <p:nvPr/>
+        </p:nvPicPr>
+        <p:blipFill>
+          <a:blip r:embed="rId1"/>
+          <a:stretch>
+            <a:fillRect/>
+          </a:stretch>
+        </p:blipFill>
+        <p:spPr>
+          <a:xfrm>
+            <a:off x="138430" y="289560"/>
+            <a:ext cx="8686800" cy="3619500"/>
+          </a:xfrm>
+          <a:prstGeom prst="rect">
+            <a:avLst/>
+          </a:prstGeom>
+        </p:spPr>
+      </p:pic>
+    </p:spTree>
+  </p:cSld>
+  <p:clrMapOvr>
+    <a:masterClrMapping/>
+  </p:clrMapOvr>
+</p:sld>
+</file>
+
 <file path=ppt/slides/slide6.xml><?xml version="1.0" encoding="utf-8"?>
 <p:sld xmlns:a="http://schemas.openxmlformats.org/drawingml/2006/main" xmlns:r="http://schemas.openxmlformats.org/officeDocument/2006/relationships" xmlns:p="http://schemas.openxmlformats.org/presentationml/2006/main">
   <p:cSld>
@@ -4938,6 +5290,233 @@
 </file>
 
 <file path=ppt/slides/slide7.xml><?xml version="1.0" encoding="utf-8"?>
+<p:sld xmlns:a="http://schemas.openxmlformats.org/drawingml/2006/main" xmlns:r="http://schemas.openxmlformats.org/officeDocument/2006/relationships" xmlns:p="http://schemas.openxmlformats.org/presentationml/2006/main">
+  <p:cSld>
+    <p:spTree>
+      <p:nvGrpSpPr>
+        <p:cNvPr id="1" name=""/>
+        <p:cNvGrpSpPr/>
+        <p:nvPr/>
+      </p:nvGrpSpPr>
+      <p:grpSpPr/>
+      <p:pic>
+        <p:nvPicPr>
+          <p:cNvPr id="13" name="图片 6"/>
+          <p:cNvPicPr>
+            <a:picLocks noChangeAspect="1"/>
+          </p:cNvPicPr>
+          <p:nvPr/>
+        </p:nvPicPr>
+        <p:blipFill>
+          <a:blip r:embed="rId1"/>
+          <a:stretch>
+            <a:fillRect/>
+          </a:stretch>
+        </p:blipFill>
+        <p:spPr>
+          <a:xfrm>
+            <a:off x="0" y="885825"/>
+            <a:ext cx="5246370" cy="5321935"/>
+          </a:xfrm>
+          <a:prstGeom prst="rect">
+            <a:avLst/>
+          </a:prstGeom>
+        </p:spPr>
+      </p:pic>
+      <p:sp>
+        <p:nvSpPr>
+          <p:cNvPr id="6" name="文本框 5"/>
+          <p:cNvSpPr>
+            <a:spLocks noGrp="1"/>
+          </p:cNvSpPr>
+          <p:nvPr/>
+        </p:nvSpPr>
+        <p:spPr>
+          <a:xfrm>
+            <a:off x="275590" y="226695"/>
+            <a:ext cx="8522970" cy="583565"/>
+          </a:xfrm>
+          <a:prstGeom prst="rect">
+            <a:avLst/>
+          </a:prstGeom>
+          <a:noFill/>
+        </p:spPr>
+        <p:txBody>
+          <a:bodyPr wrap="square">
+            <a:spAutoFit/>
+          </a:bodyPr>
+          <a:lstStyle/>
+          <a:p>
+            <a:r>
+              <a:rPr sz="3200" b="1">
+                <a:latin typeface="Times New Roman" panose="02020603050405020304"/>
+                <a:ea typeface="Times New Roman" panose="02020603050405020304"/>
+                <a:cs typeface="Times New Roman" panose="02020603050405020304"/>
+              </a:rPr>
+              <a:t>Data Collection</a:t>
+            </a:r>
+            <a:endParaRPr sz="3200" b="1">
+              <a:latin typeface="Times New Roman" panose="02020603050405020304"/>
+              <a:ea typeface="Times New Roman" panose="02020603050405020304"/>
+              <a:cs typeface="Times New Roman" panose="02020603050405020304"/>
+            </a:endParaRPr>
+          </a:p>
+        </p:txBody>
+      </p:sp>
+      <p:sp>
+        <p:nvSpPr>
+          <p:cNvPr id="3" name="文本框 2"/>
+          <p:cNvSpPr>
+            <a:spLocks noGrp="1"/>
+          </p:cNvSpPr>
+          <p:nvPr/>
+        </p:nvSpPr>
+        <p:spPr>
+          <a:xfrm>
+            <a:off x="4658360" y="635000"/>
+            <a:ext cx="4303395" cy="579755"/>
+          </a:xfrm>
+          <a:prstGeom prst="rect">
+            <a:avLst/>
+          </a:prstGeom>
+          <a:noFill/>
+        </p:spPr>
+        <p:txBody>
+          <a:bodyPr wrap="square" anchor="t">
+            <a:noAutofit/>
+          </a:bodyPr>
+          <a:lstStyle/>
+          <a:p>
+            <a:r>
+              <a:rPr sz="2000"/>
+              <a:t>I Optimized the Experimental Workflow</a:t>
+            </a:r>
+            <a:endParaRPr sz="2000"/>
+          </a:p>
+        </p:txBody>
+      </p:sp>
+      <p:sp>
+        <p:nvSpPr>
+          <p:cNvPr id="4" name="文本框 3"/>
+          <p:cNvSpPr>
+            <a:spLocks noGrp="1"/>
+          </p:cNvSpPr>
+          <p:nvPr/>
+        </p:nvSpPr>
+        <p:spPr>
+          <a:xfrm>
+            <a:off x="5337810" y="1085215"/>
+            <a:ext cx="3806190" cy="992505"/>
+          </a:xfrm>
+          <a:prstGeom prst="rect">
+            <a:avLst/>
+          </a:prstGeom>
+          <a:noFill/>
+        </p:spPr>
+        <p:txBody>
+          <a:bodyPr wrap="square">
+            <a:noAutofit/>
+          </a:bodyPr>
+          <a:lstStyle/>
+          <a:p>
+            <a:pPr marL="285750" indent="-285750">
+              <a:buFont typeface="Arial" panose="020B0604020202020204" pitchFamily="34" charset="0"/>
+              <a:buChar char="•"/>
+            </a:pPr>
+            <a:r>
+              <a:t>Controlled grasping time, </a:t>
+            </a:r>
+          </a:p>
+          <a:p>
+            <a:pPr marL="285750" indent="-285750">
+              <a:buFont typeface="Arial" panose="020B0604020202020204" pitchFamily="34" charset="0"/>
+              <a:buChar char="•"/>
+            </a:pPr>
+            <a:r>
+              <a:t>grasping behavior, </a:t>
+            </a:r>
+          </a:p>
+          <a:p>
+            <a:pPr marL="285750" indent="-285750">
+              <a:buFont typeface="Arial" panose="020B0604020202020204" pitchFamily="34" charset="0"/>
+              <a:buChar char="•"/>
+            </a:pPr>
+            <a:r>
+              <a:t>the timing of opening and closing.</a:t>
+            </a:r>
+          </a:p>
+        </p:txBody>
+      </p:sp>
+      <p:pic>
+        <p:nvPicPr>
+          <p:cNvPr id="12" name="图片 4"/>
+          <p:cNvPicPr>
+            <a:picLocks noChangeAspect="1"/>
+          </p:cNvPicPr>
+          <p:nvPr/>
+        </p:nvPicPr>
+        <p:blipFill>
+          <a:blip r:embed="rId2"/>
+          <a:stretch>
+            <a:fillRect/>
+          </a:stretch>
+        </p:blipFill>
+        <p:spPr>
+          <a:xfrm>
+            <a:off x="4571365" y="4194810"/>
+            <a:ext cx="4303395" cy="2421255"/>
+          </a:xfrm>
+          <a:prstGeom prst="rect">
+            <a:avLst/>
+          </a:prstGeom>
+        </p:spPr>
+      </p:pic>
+      <p:sp>
+        <p:nvSpPr>
+          <p:cNvPr id="2" name="文本框 1"/>
+          <p:cNvSpPr txBox="1"/>
+          <p:nvPr/>
+        </p:nvSpPr>
+        <p:spPr>
+          <a:xfrm>
+            <a:off x="5338445" y="2522220"/>
+            <a:ext cx="3701415" cy="1095375"/>
+          </a:xfrm>
+          <a:prstGeom prst="rect">
+            <a:avLst/>
+          </a:prstGeom>
+          <a:noFill/>
+        </p:spPr>
+        <p:txBody>
+          <a:bodyPr wrap="square" rtlCol="0">
+            <a:noAutofit/>
+          </a:bodyPr>
+          <a:p>
+            <a:r>
+              <a:rPr lang="en-US">
+                <a:sym typeface="+mn-ea"/>
+              </a:rPr>
+              <a:t>#.But t</a:t>
+            </a:r>
+            <a:r>
+              <a:rPr>
+                <a:sym typeface="+mn-ea"/>
+              </a:rPr>
+              <a:t>he recognition algorithm causes fluctuations in the calculated object area and finger width.</a:t>
+            </a:r>
+            <a:endParaRPr lang="zh-CN" altLang="en-US"/>
+          </a:p>
+        </p:txBody>
+      </p:sp>
+    </p:spTree>
+  </p:cSld>
+  <p:clrMapOvr>
+    <a:masterClrMapping/>
+  </p:clrMapOvr>
+</p:sld>
+</file>
+
+<file path=ppt/slides/slide8.xml><?xml version="1.0" encoding="utf-8"?>
 <p:sld xmlns:a="http://schemas.openxmlformats.org/drawingml/2006/main" xmlns:r="http://schemas.openxmlformats.org/officeDocument/2006/relationships" xmlns:p="http://schemas.openxmlformats.org/presentationml/2006/main">
   <p:cSld>
     <p:spTree>
@@ -5299,7 +5878,7 @@
 </p:sld>
 </file>
 
-<file path=ppt/slides/slide8.xml><?xml version="1.0" encoding="utf-8"?>
+<file path=ppt/slides/slide9.xml><?xml version="1.0" encoding="utf-8"?>
 <p:sld xmlns:a="http://schemas.openxmlformats.org/drawingml/2006/main" xmlns:r="http://schemas.openxmlformats.org/officeDocument/2006/relationships" xmlns:p="http://schemas.openxmlformats.org/presentationml/2006/main">
   <p:cSld>
     <p:spTree>
@@ -5833,400 +6412,6 @@
       </p:par>
     </p:tnLst>
   </p:timing>
-</p:sld>
-</file>
-
-<file path=ppt/slides/slide9.xml><?xml version="1.0" encoding="utf-8"?>
-<p:sld xmlns:a="http://schemas.openxmlformats.org/drawingml/2006/main" xmlns:r="http://schemas.openxmlformats.org/officeDocument/2006/relationships" xmlns:p="http://schemas.openxmlformats.org/presentationml/2006/main">
-  <p:cSld>
-    <p:spTree>
-      <p:nvGrpSpPr>
-        <p:cNvPr id="1" name=""/>
-        <p:cNvGrpSpPr/>
-        <p:nvPr/>
-      </p:nvGrpSpPr>
-      <p:grpSpPr/>
-      <p:sp>
-        <p:nvSpPr>
-          <p:cNvPr id="6" name="文本框 5"/>
-          <p:cNvSpPr>
-            <a:spLocks noGrp="1"/>
-          </p:cNvSpPr>
-          <p:nvPr/>
-        </p:nvSpPr>
-        <p:spPr>
-          <a:xfrm>
-            <a:off x="275590" y="226695"/>
-            <a:ext cx="8522970" cy="583565"/>
-          </a:xfrm>
-          <a:prstGeom prst="rect">
-            <a:avLst/>
-          </a:prstGeom>
-          <a:noFill/>
-        </p:spPr>
-        <p:txBody>
-          <a:bodyPr wrap="square">
-            <a:spAutoFit/>
-          </a:bodyPr>
-          <a:lstStyle/>
-          <a:p>
-            <a:r>
-              <a:rPr sz="3200" b="1">
-                <a:latin typeface="Times New Roman" panose="02020603050405020304"/>
-                <a:ea typeface="Times New Roman" panose="02020603050405020304"/>
-                <a:cs typeface="Times New Roman" panose="02020603050405020304"/>
-              </a:rPr>
-              <a:t>Model and Test Results</a:t>
-            </a:r>
-            <a:endParaRPr sz="3200" b="1">
-              <a:latin typeface="Times New Roman" panose="02020603050405020304"/>
-              <a:ea typeface="Times New Roman" panose="02020603050405020304"/>
-              <a:cs typeface="Times New Roman" panose="02020603050405020304"/>
-            </a:endParaRPr>
-          </a:p>
-        </p:txBody>
-      </p:sp>
-      <p:pic>
-        <p:nvPicPr>
-          <p:cNvPr id="19" name="图片 6"/>
-          <p:cNvPicPr>
-            <a:picLocks noChangeAspect="1"/>
-          </p:cNvPicPr>
-          <p:nvPr/>
-        </p:nvPicPr>
-        <p:blipFill>
-          <a:blip r:embed="rId1"/>
-          <a:stretch>
-            <a:fillRect/>
-          </a:stretch>
-        </p:blipFill>
-        <p:spPr>
-          <a:xfrm>
-            <a:off x="4706620" y="0"/>
-            <a:ext cx="4437380" cy="2218690"/>
-          </a:xfrm>
-          <a:prstGeom prst="rect">
-            <a:avLst/>
-          </a:prstGeom>
-        </p:spPr>
-      </p:pic>
-      <p:sp>
-        <p:nvSpPr>
-          <p:cNvPr id="8" name="文本框 7"/>
-          <p:cNvSpPr>
-            <a:spLocks noGrp="1"/>
-          </p:cNvSpPr>
-          <p:nvPr/>
-        </p:nvSpPr>
-        <p:spPr>
-          <a:xfrm>
-            <a:off x="275590" y="810260"/>
-            <a:ext cx="5143500" cy="398780"/>
-          </a:xfrm>
-          <a:prstGeom prst="rect">
-            <a:avLst/>
-          </a:prstGeom>
-          <a:noFill/>
-        </p:spPr>
-        <p:txBody>
-          <a:bodyPr wrap="square" anchor="t">
-            <a:spAutoFit/>
-          </a:bodyPr>
-          <a:lstStyle/>
-          <a:p>
-            <a:r>
-              <a:rPr lang="en-US" sz="2000"/>
-              <a:t>Model: </a:t>
-            </a:r>
-            <a:r>
-              <a:rPr sz="2000"/>
-              <a:t>15-Frame Time-Window MLP</a:t>
-            </a:r>
-            <a:endParaRPr sz="2000"/>
-          </a:p>
-        </p:txBody>
-      </p:sp>
-      <p:pic>
-        <p:nvPicPr>
-          <p:cNvPr id="21" name="图片 8"/>
-          <p:cNvPicPr>
-            <a:picLocks noChangeAspect="1"/>
-          </p:cNvPicPr>
-          <p:nvPr/>
-        </p:nvPicPr>
-        <p:blipFill>
-          <a:blip r:embed="rId2"/>
-          <a:stretch>
-            <a:fillRect/>
-          </a:stretch>
-        </p:blipFill>
-        <p:spPr>
-          <a:xfrm>
-            <a:off x="4706620" y="4438015"/>
-            <a:ext cx="4436110" cy="2218690"/>
-          </a:xfrm>
-          <a:prstGeom prst="rect">
-            <a:avLst/>
-          </a:prstGeom>
-        </p:spPr>
-      </p:pic>
-      <p:pic>
-        <p:nvPicPr>
-          <p:cNvPr id="22" name="图片 10"/>
-          <p:cNvPicPr>
-            <a:picLocks noChangeAspect="1"/>
-          </p:cNvPicPr>
-          <p:nvPr/>
-        </p:nvPicPr>
-        <p:blipFill>
-          <a:blip r:embed="rId3"/>
-          <a:stretch>
-            <a:fillRect/>
-          </a:stretch>
-        </p:blipFill>
-        <p:spPr>
-          <a:xfrm>
-            <a:off x="4706620" y="2218690"/>
-            <a:ext cx="4437380" cy="2219325"/>
-          </a:xfrm>
-          <a:prstGeom prst="rect">
-            <a:avLst/>
-          </a:prstGeom>
-        </p:spPr>
-      </p:pic>
-      <p:pic>
-        <p:nvPicPr>
-          <p:cNvPr id="23" name="图片 11"/>
-          <p:cNvPicPr>
-            <a:picLocks noChangeAspect="1"/>
-          </p:cNvPicPr>
-          <p:nvPr/>
-        </p:nvPicPr>
-        <p:blipFill>
-          <a:blip r:embed="rId4"/>
-          <a:stretch>
-            <a:fillRect/>
-          </a:stretch>
-        </p:blipFill>
-        <p:spPr>
-          <a:xfrm>
-            <a:off x="0" y="3882390"/>
-            <a:ext cx="4624070" cy="2774315"/>
-          </a:xfrm>
-          <a:prstGeom prst="rect">
-            <a:avLst/>
-          </a:prstGeom>
-        </p:spPr>
-      </p:pic>
-      <p:sp>
-        <p:nvSpPr>
-          <p:cNvPr id="13" name="文本框 12"/>
-          <p:cNvSpPr>
-            <a:spLocks noGrp="1"/>
-          </p:cNvSpPr>
-          <p:nvPr/>
-        </p:nvSpPr>
-        <p:spPr>
-          <a:xfrm>
-            <a:off x="186690" y="3502025"/>
-            <a:ext cx="4437380" cy="368300"/>
-          </a:xfrm>
-          <a:prstGeom prst="rect">
-            <a:avLst/>
-          </a:prstGeom>
-          <a:noFill/>
-        </p:spPr>
-        <p:txBody>
-          <a:bodyPr wrap="square">
-            <a:spAutoFit/>
-          </a:bodyPr>
-          <a:lstStyle/>
-          <a:p>
-            <a:r>
-              <a:t>Test </a:t>
-            </a:r>
-            <a:r>
-              <a:rPr>
-                <a:sym typeface="+mn-ea"/>
-              </a:rPr>
-              <a:t>dataset</a:t>
-            </a:r>
-            <a:r>
-              <a:t>: 3 Object Sizes, 3 </a:t>
-            </a:r>
-            <a:r>
-              <a:rPr lang="en-US"/>
-              <a:t>t</a:t>
-            </a:r>
-            <a:r>
-              <a:t>rials </a:t>
-            </a:r>
-            <a:r>
-              <a:rPr lang="en-US"/>
-              <a:t>e</a:t>
-            </a:r>
-            <a:r>
-              <a:t>ach</a:t>
-            </a:r>
-          </a:p>
-        </p:txBody>
-      </p:sp>
-      <p:sp>
-        <p:nvSpPr>
-          <p:cNvPr id="5" name="文本框 4"/>
-          <p:cNvSpPr txBox="1"/>
-          <p:nvPr/>
-        </p:nvSpPr>
-        <p:spPr>
-          <a:xfrm>
-            <a:off x="186690" y="3068955"/>
-            <a:ext cx="4437380" cy="433705"/>
-          </a:xfrm>
-          <a:prstGeom prst="rect">
-            <a:avLst/>
-          </a:prstGeom>
-          <a:noFill/>
-        </p:spPr>
-        <p:txBody>
-          <a:bodyPr wrap="square" rtlCol="0">
-            <a:noAutofit/>
-          </a:bodyPr>
-          <a:p>
-            <a:r>
-              <a:rPr>
-                <a:sym typeface="+mn-ea"/>
-              </a:rPr>
-              <a:t>Training dataset: </a:t>
-            </a:r>
-            <a:r>
-              <a:rPr>
-                <a:sym typeface="+mn-ea"/>
-              </a:rPr>
-              <a:t>3 Object Sizes,</a:t>
-            </a:r>
-            <a:r>
-              <a:rPr lang="en-US">
-                <a:sym typeface="+mn-ea"/>
-              </a:rPr>
-              <a:t> </a:t>
-            </a:r>
-            <a:r>
-              <a:rPr>
-                <a:sym typeface="+mn-ea"/>
-              </a:rPr>
-              <a:t>10 trials </a:t>
-            </a:r>
-            <a:r>
-              <a:rPr lang="en-US">
-                <a:sym typeface="+mn-ea"/>
-              </a:rPr>
-              <a:t>e</a:t>
-            </a:r>
-            <a:r>
-              <a:rPr>
-                <a:sym typeface="+mn-ea"/>
-              </a:rPr>
-              <a:t>ach</a:t>
-            </a:r>
-            <a:endParaRPr>
-              <a:sym typeface="+mn-ea"/>
-            </a:endParaRPr>
-          </a:p>
-          <a:p>
-            <a:endParaRPr lang="zh-CN" altLang="en-US"/>
-          </a:p>
-        </p:txBody>
-      </p:sp>
-      <p:sp>
-        <p:nvSpPr>
-          <p:cNvPr id="2" name="文本框 1"/>
-          <p:cNvSpPr txBox="1"/>
-          <p:nvPr/>
-        </p:nvSpPr>
-        <p:spPr>
-          <a:xfrm>
-            <a:off x="275590" y="1144270"/>
-            <a:ext cx="3048000" cy="368300"/>
-          </a:xfrm>
-          <a:prstGeom prst="rect">
-            <a:avLst/>
-          </a:prstGeom>
-          <a:noFill/>
-        </p:spPr>
-        <p:txBody>
-          <a:bodyPr wrap="square" rtlCol="0">
-            <a:spAutoFit/>
-          </a:bodyPr>
-          <a:p>
-            <a:r>
-              <a:rPr lang="en-US" altLang="zh-CN"/>
-              <a:t>Three Input Modes:</a:t>
-            </a:r>
-            <a:endParaRPr lang="zh-CN" altLang="en-US">
-              <a:ea typeface="宋体" panose="02010600030101010101" pitchFamily="2" charset="-122"/>
-            </a:endParaRPr>
-          </a:p>
-        </p:txBody>
-      </p:sp>
-      <p:sp>
-        <p:nvSpPr>
-          <p:cNvPr id="3" name="文本框 2"/>
-          <p:cNvSpPr txBox="1"/>
-          <p:nvPr/>
-        </p:nvSpPr>
-        <p:spPr>
-          <a:xfrm>
-            <a:off x="1382395" y="1449070"/>
-            <a:ext cx="3242310" cy="922020"/>
-          </a:xfrm>
-          <a:prstGeom prst="rect">
-            <a:avLst/>
-          </a:prstGeom>
-        </p:spPr>
-        <p:txBody>
-          <a:bodyPr wrap="square">
-            <a:spAutoFit/>
-          </a:bodyPr>
-          <a:p>
-            <a:pPr marL="285750" indent="-285750">
-              <a:buFont typeface="Arial" panose="020B0604020202020204" pitchFamily="34" charset="0"/>
-              <a:buChar char="•"/>
-            </a:pPr>
-            <a:r>
-              <a:rPr lang="en-US" altLang="zh-CN"/>
-              <a:t>Object Area</a:t>
-            </a:r>
-            <a:endParaRPr lang="en-US" altLang="zh-CN"/>
-          </a:p>
-          <a:p>
-            <a:pPr marL="285750" indent="-285750">
-              <a:buFont typeface="Arial" panose="020B0604020202020204" pitchFamily="34" charset="0"/>
-              <a:buChar char="•"/>
-            </a:pPr>
-            <a:r>
-              <a:rPr lang="en-US" altLang="zh-CN"/>
-              <a:t>Object Area + Velocity</a:t>
-            </a:r>
-            <a:endParaRPr lang="en-US" altLang="zh-CN"/>
-          </a:p>
-          <a:p>
-            <a:pPr marL="285750" indent="-285750">
-              <a:buFont typeface="Arial" panose="020B0604020202020204" pitchFamily="34" charset="0"/>
-              <a:buChar char="•"/>
-            </a:pPr>
-            <a:r>
-              <a:rPr lang="en-US" altLang="zh-CN"/>
-              <a:t>Object Area + Acceleration</a:t>
-            </a:r>
-            <a:endParaRPr lang="en-US" altLang="zh-CN"/>
-          </a:p>
-        </p:txBody>
-      </p:sp>
-    </p:spTree>
-  </p:cSld>
-  <p:clrMapOvr>
-    <a:masterClrMapping/>
-  </p:clrMapOvr>
 </p:sld>
 </file>
 
